--- a/docs/Slide09_site_and_charge.pptx
+++ b/docs/Slide09_site_and_charge.pptx
@@ -1298,7 +1298,7 @@
                 <a:ea typeface="Arial"/>
                 <a:cs typeface="Arial"/>
               </a:rPr>
-              <a:t>Sublattice: the set of equivalent positions one element occupies  ·  Aliovalent: a dopant whose charge differs from the ion it replaces</a:t>
+              <a:t>Sublattice: the equivalent positions one element occupies  ·  Aliovalent: a dopant of different charge  ·  bars = three doping levels, not repeat runs</a:t>
             </a:r>
           </a:p>
         </p:txBody>
@@ -1974,16 +1974,16 @@
                 </a:solidFill>
                 <a:latin typeface="Arial"/>
               </a:rPr>
-              <a:t>large cations go to Li sites, small group-14 ions replace P — </a:t>
+              <a:t>only Si always takes the P framework; 19 of 26 always take Li — </a:t>
             </a:r>
             <a:r>
               <a:rPr sz="1150" b="1">
                 <a:solidFill>
-                  <a:srgbClr val="2563EB"/>
+                  <a:srgbClr val="BE123C"/>
                 </a:solidFill>
                 <a:latin typeface="Arial"/>
               </a:rPr>
-              <a:t>size decides it</a:t>
+              <a:t>6 switch with the doping level</a:t>
             </a:r>
           </a:p>
         </p:txBody>

--- a/docs/Slide09_site_and_charge.pptx
+++ b/docs/Slide09_site_and_charge.pptx
@@ -1298,7 +1298,7 @@
                 <a:ea typeface="Arial"/>
                 <a:cs typeface="Arial"/>
               </a:rPr>
-              <a:t>Sublattice: the equivalent positions one element occupies  ·  Aliovalent: a dopant of different charge  ·  bars = three doping levels, not repeat runs</a:t>
+              <a:t>Sublattice: equivalent positions of one element  ·  Charge compensation: adding or removing Li to keep the cell neutral  ·  bars = three doping levels, not repeat runs</a:t>
             </a:r>
           </a:p>
         </p:txBody>
@@ -1684,7 +1684,7 @@
                 <a:ea typeface="Arial"/>
                 <a:cs typeface="Arial"/>
               </a:rPr>
-              <a:t>An aliovalent dopant changes the Li content, and </a:t>
+              <a:t>A 2+ dopant on a Li site leaves extra charge — </a:t>
             </a:r>
             <a:r>
               <a:rPr sz="1275" b="1">
@@ -1695,7 +1695,7 @@
                 <a:ea typeface="Arial"/>
                 <a:cs typeface="Arial"/>
               </a:rPr>
-              <a:t>more than one way balances the charge</a:t>
+              <a:t>each way of balancing it is a different structure</a:t>
             </a:r>
             <a:r>
               <a:rPr sz="1275" b="0">

--- a/docs/Slide09_site_and_charge.pptx
+++ b/docs/Slide09_site_and_charge.pptx
@@ -1684,7 +1684,7 @@
                 <a:ea typeface="Arial"/>
                 <a:cs typeface="Arial"/>
               </a:rPr>
-              <a:t>A 2+ dopant on a Li site leaves extra charge — </a:t>
+              <a:t>Mg²⁺ on a Li⁺ site leaves extra charge — </a:t>
             </a:r>
             <a:r>
               <a:rPr sz="1275" b="1">

--- a/docs/Slide09_site_and_charge.pptx
+++ b/docs/Slide09_site_and_charge.pptx
@@ -1684,7 +1684,7 @@
                 <a:ea typeface="Arial"/>
                 <a:cs typeface="Arial"/>
               </a:rPr>
-              <a:t>Mg²⁺ on a Li⁺ site leaves extra charge — </a:t>
+              <a:t>A 2+ dopant on a Li site leaves extra charge — </a:t>
             </a:r>
             <a:r>
               <a:rPr sz="1275" b="1">
